--- a/src/ppt-super/assets/tpl-05-staircase/template.pptx
+++ b/src/ppt-super/assets/tpl-05-staircase/template.pptx
@@ -3136,7 +3136,14 @@
           <a:bodyPr rtlCol="0" anchor="ctr"/>
           <a:lstStyle/>
           <a:p>
-            <a:pPr algn="ctr"/>
+            <a:pPr algn="ctr">
+              <a:spcBef>
+                <a:spcPts val="0"/>
+              </a:spcBef>
+              <a:spcAft>
+                <a:spcPts val="0"/>
+              </a:spcAft>
+            </a:pPr>
           </a:p>
         </p:txBody>
       </p:sp>
@@ -3166,14 +3173,21 @@
               <a:lnSpc>
                 <a:spcPct val="112000"/>
               </a:lnSpc>
-            </a:pPr>
-            <a:r>
-              <a:rPr sz="1400" b="1" i="0">
+              <a:spcBef>
+                <a:spcPts val="0"/>
+              </a:spcBef>
+              <a:spcAft>
+                <a:spcPts val="0"/>
+              </a:spcAft>
+            </a:pPr>
+            <a:r>
+              <a:rPr sz="1400" b="1" i="0" lang="zh-CN" altLang="zh-CN">
                 <a:solidFill>
                   <a:srgbClr val="FFFFFF"/>
                 </a:solidFill>
                 <a:latin typeface="Microsoft YaHei"/>
                 <a:ea typeface="Microsoft YaHei"/>
+                <a:cs typeface="Microsoft YaHei"/>
               </a:rPr>
               <a:t>自智网络</a:t>
             </a:r>
@@ -3206,14 +3220,21 @@
               <a:lnSpc>
                 <a:spcPct val="112000"/>
               </a:lnSpc>
-            </a:pPr>
-            <a:r>
-              <a:rPr sz="2200" b="1" i="0">
+              <a:spcBef>
+                <a:spcPts val="0"/>
+              </a:spcBef>
+              <a:spcAft>
+                <a:spcPts val="0"/>
+              </a:spcAft>
+            </a:pPr>
+            <a:r>
+              <a:rPr sz="2200" b="1" i="0" lang="zh-CN" altLang="zh-CN">
                 <a:solidFill>
                   <a:srgbClr val="B90A0A"/>
                 </a:solidFill>
                 <a:latin typeface="Microsoft YaHei"/>
                 <a:ea typeface="Microsoft YaHei"/>
+                <a:cs typeface="Microsoft YaHei"/>
               </a:rPr>
               <a:t>自智网络演进: L3 条件自治规模商用, 2028 迈向 L4 高度自治</a:t>
             </a:r>
@@ -3335,7 +3356,14 @@
           <a:bodyPr rtlCol="0" anchor="ctr"/>
           <a:lstStyle/>
           <a:p>
-            <a:pPr algn="ctr"/>
+            <a:pPr algn="ctr">
+              <a:spcBef>
+                <a:spcPts val="0"/>
+              </a:spcBef>
+              <a:spcAft>
+                <a:spcPts val="0"/>
+              </a:spcAft>
+            </a:pPr>
           </a:p>
         </p:txBody>
       </p:sp>
@@ -3347,8 +3375,8 @@
         </p:nvSpPr>
         <p:spPr>
           <a:xfrm>
-            <a:off x="762000" y="4762500"/>
-            <a:ext cx="1568450" cy="254000"/>
+            <a:off x="762000" y="4688459"/>
+            <a:ext cx="1568450" cy="402082"/>
           </a:xfrm>
           <a:prstGeom prst="rect">
             <a:avLst/>
@@ -3365,14 +3393,21 @@
               <a:lnSpc>
                 <a:spcPct val="112000"/>
               </a:lnSpc>
-            </a:pPr>
-            <a:r>
-              <a:rPr sz="2400" b="1" i="0">
+              <a:spcBef>
+                <a:spcPts val="0"/>
+              </a:spcBef>
+              <a:spcAft>
+                <a:spcPts val="0"/>
+              </a:spcAft>
+            </a:pPr>
+            <a:r>
+              <a:rPr sz="2400" b="1" i="0" lang="zh-CN" altLang="zh-CN">
                 <a:solidFill>
                   <a:srgbClr val="262626"/>
                 </a:solidFill>
                 <a:latin typeface="Microsoft YaHei"/>
                 <a:ea typeface="Microsoft YaHei"/>
+                <a:cs typeface="Microsoft YaHei"/>
               </a:rPr>
               <a:t>L1</a:t>
             </a:r>
@@ -3387,8 +3422,8 @@
         </p:nvSpPr>
         <p:spPr>
           <a:xfrm>
-            <a:off x="825500" y="5029200"/>
-            <a:ext cx="1441450" cy="203200"/>
+            <a:off x="825500" y="5012817"/>
+            <a:ext cx="1441450" cy="235965"/>
           </a:xfrm>
           <a:prstGeom prst="rect">
             <a:avLst/>
@@ -3405,14 +3440,21 @@
               <a:lnSpc>
                 <a:spcPct val="112000"/>
               </a:lnSpc>
-            </a:pPr>
-            <a:r>
-              <a:rPr sz="1350" b="1" i="0">
+              <a:spcBef>
+                <a:spcPts val="0"/>
+              </a:spcBef>
+              <a:spcAft>
+                <a:spcPts val="0"/>
+              </a:spcAft>
+            </a:pPr>
+            <a:r>
+              <a:rPr sz="1350" b="1" i="0" lang="zh-CN" altLang="zh-CN">
                 <a:solidFill>
                   <a:srgbClr val="262626"/>
                 </a:solidFill>
                 <a:latin typeface="Microsoft YaHei"/>
                 <a:ea typeface="Microsoft YaHei"/>
+                <a:cs typeface="Microsoft YaHei"/>
               </a:rPr>
               <a:t>辅助运维</a:t>
             </a:r>
@@ -3445,14 +3487,21 @@
               <a:lnSpc>
                 <a:spcPct val="112000"/>
               </a:lnSpc>
-            </a:pPr>
-            <a:r>
-              <a:rPr sz="1050" b="0" i="0">
+              <a:spcBef>
+                <a:spcPts val="0"/>
+              </a:spcBef>
+              <a:spcAft>
+                <a:spcPts val="0"/>
+              </a:spcAft>
+            </a:pPr>
+            <a:r>
+              <a:rPr sz="1050" b="0" i="0" lang="zh-CN" altLang="zh-CN">
                 <a:solidFill>
                   <a:srgbClr val="595959"/>
                 </a:solidFill>
                 <a:latin typeface="Microsoft YaHei"/>
                 <a:ea typeface="Microsoft YaHei"/>
+                <a:cs typeface="Microsoft YaHei"/>
               </a:rPr>
               <a:t>人工为主, 系统仅提供数据采集与监控工具, 排障依赖个人经验, 跨部门工单流转周期以天计</a:t>
             </a:r>
@@ -3501,7 +3550,14 @@
           <a:bodyPr rtlCol="0" anchor="ctr"/>
           <a:lstStyle/>
           <a:p>
-            <a:pPr algn="ctr"/>
+            <a:pPr algn="ctr">
+              <a:spcBef>
+                <a:spcPts val="0"/>
+              </a:spcBef>
+              <a:spcAft>
+                <a:spcPts val="0"/>
+              </a:spcAft>
+            </a:pPr>
           </a:p>
         </p:txBody>
       </p:sp>
@@ -3550,7 +3606,14 @@
           <a:bodyPr rtlCol="0" anchor="ctr"/>
           <a:lstStyle/>
           <a:p>
-            <a:pPr algn="ctr"/>
+            <a:pPr algn="ctr">
+              <a:spcBef>
+                <a:spcPts val="0"/>
+              </a:spcBef>
+              <a:spcAft>
+                <a:spcPts val="0"/>
+              </a:spcAft>
+            </a:pPr>
           </a:p>
         </p:txBody>
       </p:sp>
@@ -3580,14 +3643,21 @@
               <a:lnSpc>
                 <a:spcPct val="112000"/>
               </a:lnSpc>
-            </a:pPr>
-            <a:r>
-              <a:rPr sz="1000" b="0" i="0">
+              <a:spcBef>
+                <a:spcPts val="0"/>
+              </a:spcBef>
+              <a:spcAft>
+                <a:spcPts val="0"/>
+              </a:spcAft>
+            </a:pPr>
+            <a:r>
+              <a:rPr sz="1000" b="0" i="0" lang="zh-CN" altLang="zh-CN">
                 <a:solidFill>
                   <a:srgbClr val="595959"/>
                 </a:solidFill>
                 <a:latin typeface="Microsoft YaHei"/>
                 <a:ea typeface="Microsoft YaHei"/>
+                <a:cs typeface="Microsoft YaHei"/>
               </a:rPr>
               <a:t>2023</a:t>
             </a:r>
@@ -3634,7 +3704,14 @@
           <a:bodyPr rtlCol="0" anchor="ctr"/>
           <a:lstStyle/>
           <a:p>
-            <a:pPr algn="ctr"/>
+            <a:pPr algn="ctr">
+              <a:spcBef>
+                <a:spcPts val="0"/>
+              </a:spcBef>
+              <a:spcAft>
+                <a:spcPts val="0"/>
+              </a:spcAft>
+            </a:pPr>
           </a:p>
         </p:txBody>
       </p:sp>
@@ -3646,8 +3723,8 @@
         </p:nvSpPr>
         <p:spPr>
           <a:xfrm>
-            <a:off x="2368550" y="4000500"/>
-            <a:ext cx="1568450" cy="254000"/>
+            <a:off x="2368550" y="3926459"/>
+            <a:ext cx="1568450" cy="402082"/>
           </a:xfrm>
           <a:prstGeom prst="rect">
             <a:avLst/>
@@ -3664,14 +3741,21 @@
               <a:lnSpc>
                 <a:spcPct val="112000"/>
               </a:lnSpc>
-            </a:pPr>
-            <a:r>
-              <a:rPr sz="2400" b="1" i="0">
+              <a:spcBef>
+                <a:spcPts val="0"/>
+              </a:spcBef>
+              <a:spcAft>
+                <a:spcPts val="0"/>
+              </a:spcAft>
+            </a:pPr>
+            <a:r>
+              <a:rPr sz="2400" b="1" i="0" lang="zh-CN" altLang="zh-CN">
                 <a:solidFill>
                   <a:srgbClr val="262626"/>
                 </a:solidFill>
                 <a:latin typeface="Microsoft YaHei"/>
                 <a:ea typeface="Microsoft YaHei"/>
+                <a:cs typeface="Microsoft YaHei"/>
               </a:rPr>
               <a:t>L2</a:t>
             </a:r>
@@ -3686,8 +3770,8 @@
         </p:nvSpPr>
         <p:spPr>
           <a:xfrm>
-            <a:off x="2432050" y="4267200"/>
-            <a:ext cx="1441450" cy="203200"/>
+            <a:off x="2432050" y="4250817"/>
+            <a:ext cx="1441450" cy="235965"/>
           </a:xfrm>
           <a:prstGeom prst="rect">
             <a:avLst/>
@@ -3704,14 +3788,21 @@
               <a:lnSpc>
                 <a:spcPct val="112000"/>
               </a:lnSpc>
-            </a:pPr>
-            <a:r>
-              <a:rPr sz="1350" b="1" i="0">
+              <a:spcBef>
+                <a:spcPts val="0"/>
+              </a:spcBef>
+              <a:spcAft>
+                <a:spcPts val="0"/>
+              </a:spcAft>
+            </a:pPr>
+            <a:r>
+              <a:rPr sz="1350" b="1" i="0" lang="zh-CN" altLang="zh-CN">
                 <a:solidFill>
                   <a:srgbClr val="262626"/>
                 </a:solidFill>
                 <a:latin typeface="Microsoft YaHei"/>
                 <a:ea typeface="Microsoft YaHei"/>
+                <a:cs typeface="Microsoft YaHei"/>
               </a:rPr>
               <a:t>部分自治</a:t>
             </a:r>
@@ -3726,8 +3817,8 @@
         </p:nvSpPr>
         <p:spPr>
           <a:xfrm>
-            <a:off x="2393950" y="3048000"/>
-            <a:ext cx="1517650" cy="838200"/>
+            <a:off x="2372487" y="3048000"/>
+            <a:ext cx="1560576" cy="838200"/>
           </a:xfrm>
           <a:prstGeom prst="rect">
             <a:avLst/>
@@ -3744,14 +3835,21 @@
               <a:lnSpc>
                 <a:spcPct val="112000"/>
               </a:lnSpc>
-            </a:pPr>
-            <a:r>
-              <a:rPr sz="1050" b="0" i="0">
+              <a:spcBef>
+                <a:spcPts val="0"/>
+              </a:spcBef>
+              <a:spcAft>
+                <a:spcPts val="0"/>
+              </a:spcAft>
+            </a:pPr>
+            <a:r>
+              <a:rPr sz="1050" b="0" i="0" lang="zh-CN" altLang="zh-CN">
                 <a:solidFill>
                   <a:srgbClr val="595959"/>
                 </a:solidFill>
                 <a:latin typeface="Microsoft YaHei"/>
                 <a:ea typeface="Microsoft YaHei"/>
+                <a:cs typeface="Microsoft YaHei"/>
               </a:rPr>
               <a:t>高频重复任务脚本化执行, 配置下发与例行巡检自动化, 故障定界仍依赖专家经验, 夜间值守压力大</a:t>
             </a:r>
@@ -3800,7 +3898,14 @@
           <a:bodyPr rtlCol="0" anchor="ctr"/>
           <a:lstStyle/>
           <a:p>
-            <a:pPr algn="ctr"/>
+            <a:pPr algn="ctr">
+              <a:spcBef>
+                <a:spcPts val="0"/>
+              </a:spcBef>
+              <a:spcAft>
+                <a:spcPts val="0"/>
+              </a:spcAft>
+            </a:pPr>
           </a:p>
         </p:txBody>
       </p:sp>
@@ -3938,14 +4043,21 @@
               <a:lnSpc>
                 <a:spcPct val="112000"/>
               </a:lnSpc>
-            </a:pPr>
-            <a:r>
-              <a:rPr sz="900" b="0" i="0">
+              <a:spcBef>
+                <a:spcPts val="0"/>
+              </a:spcBef>
+              <a:spcAft>
+                <a:spcPts val="0"/>
+              </a:spcAft>
+            </a:pPr>
+            <a:r>
+              <a:rPr sz="900" b="0" i="0" lang="zh-CN" altLang="zh-CN">
                 <a:solidFill>
                   <a:srgbClr val="262626"/>
                 </a:solidFill>
                 <a:latin typeface="Microsoft YaHei"/>
                 <a:ea typeface="Microsoft YaHei"/>
+                <a:cs typeface="Microsoft YaHei"/>
               </a:rPr>
               <a:t>现网渗透率</a:t>
             </a:r>
@@ -3960,8 +4072,8 @@
         </p:nvSpPr>
         <p:spPr>
           <a:xfrm>
-            <a:off x="2368550" y="5359400"/>
-            <a:ext cx="1568450" cy="254000"/>
+            <a:off x="2368550" y="5309108"/>
+            <a:ext cx="1568450" cy="354584"/>
           </a:xfrm>
           <a:prstGeom prst="rect">
             <a:avLst/>
@@ -3978,14 +4090,21 @@
               <a:lnSpc>
                 <a:spcPct val="112000"/>
               </a:lnSpc>
-            </a:pPr>
-            <a:r>
-              <a:rPr sz="2100" b="1" i="0">
+              <a:spcBef>
+                <a:spcPts val="0"/>
+              </a:spcBef>
+              <a:spcAft>
+                <a:spcPts val="0"/>
+              </a:spcAft>
+            </a:pPr>
+            <a:r>
+              <a:rPr sz="2100" b="1" i="0" lang="zh-CN" altLang="zh-CN">
                 <a:solidFill>
                   <a:srgbClr val="262626"/>
                 </a:solidFill>
                 <a:latin typeface="Microsoft YaHei"/>
                 <a:ea typeface="Microsoft YaHei"/>
+                <a:cs typeface="Microsoft YaHei"/>
               </a:rPr>
               <a:t>68%</a:t>
             </a:r>
@@ -4018,14 +4137,21 @@
               <a:lnSpc>
                 <a:spcPct val="112000"/>
               </a:lnSpc>
-            </a:pPr>
-            <a:r>
-              <a:rPr sz="1000" b="0" i="0">
+              <a:spcBef>
+                <a:spcPts val="0"/>
+              </a:spcBef>
+              <a:spcAft>
+                <a:spcPts val="0"/>
+              </a:spcAft>
+            </a:pPr>
+            <a:r>
+              <a:rPr sz="1000" b="0" i="0" lang="zh-CN" altLang="zh-CN">
                 <a:solidFill>
                   <a:srgbClr val="595959"/>
                 </a:solidFill>
                 <a:latin typeface="Microsoft YaHei"/>
                 <a:ea typeface="Microsoft YaHei"/>
+                <a:cs typeface="Microsoft YaHei"/>
               </a:rPr>
               <a:t>2024</a:t>
             </a:r>
@@ -4072,7 +4198,14 @@
           <a:bodyPr rtlCol="0" anchor="ctr"/>
           <a:lstStyle/>
           <a:p>
-            <a:pPr algn="ctr"/>
+            <a:pPr algn="ctr">
+              <a:spcBef>
+                <a:spcPts val="0"/>
+              </a:spcBef>
+              <a:spcAft>
+                <a:spcPts val="0"/>
+              </a:spcAft>
+            </a:pPr>
           </a:p>
         </p:txBody>
       </p:sp>
@@ -4084,8 +4217,8 @@
         </p:nvSpPr>
         <p:spPr>
           <a:xfrm>
-            <a:off x="3975100" y="3238500"/>
-            <a:ext cx="1568450" cy="254000"/>
+            <a:off x="3975100" y="3164459"/>
+            <a:ext cx="1568450" cy="402082"/>
           </a:xfrm>
           <a:prstGeom prst="rect">
             <a:avLst/>
@@ -4102,14 +4235,21 @@
               <a:lnSpc>
                 <a:spcPct val="112000"/>
               </a:lnSpc>
-            </a:pPr>
-            <a:r>
-              <a:rPr sz="2400" b="1" i="0">
+              <a:spcBef>
+                <a:spcPts val="0"/>
+              </a:spcBef>
+              <a:spcAft>
+                <a:spcPts val="0"/>
+              </a:spcAft>
+            </a:pPr>
+            <a:r>
+              <a:rPr sz="2400" b="1" i="0" lang="zh-CN" altLang="zh-CN">
                 <a:solidFill>
                   <a:srgbClr val="FFFFFF"/>
                 </a:solidFill>
                 <a:latin typeface="Microsoft YaHei"/>
                 <a:ea typeface="Microsoft YaHei"/>
+                <a:cs typeface="Microsoft YaHei"/>
               </a:rPr>
               <a:t>L3</a:t>
             </a:r>
@@ -4124,8 +4264,8 @@
         </p:nvSpPr>
         <p:spPr>
           <a:xfrm>
-            <a:off x="4038600" y="3505200"/>
-            <a:ext cx="1441450" cy="203200"/>
+            <a:off x="4038600" y="3488816"/>
+            <a:ext cx="1441450" cy="235965"/>
           </a:xfrm>
           <a:prstGeom prst="rect">
             <a:avLst/>
@@ -4142,14 +4282,21 @@
               <a:lnSpc>
                 <a:spcPct val="112000"/>
               </a:lnSpc>
-            </a:pPr>
-            <a:r>
-              <a:rPr sz="1350" b="1" i="0">
+              <a:spcBef>
+                <a:spcPts val="0"/>
+              </a:spcBef>
+              <a:spcAft>
+                <a:spcPts val="0"/>
+              </a:spcAft>
+            </a:pPr>
+            <a:r>
+              <a:rPr sz="1350" b="1" i="0" lang="zh-CN" altLang="zh-CN">
                 <a:solidFill>
                   <a:srgbClr val="FFFFFF"/>
                 </a:solidFill>
                 <a:latin typeface="Microsoft YaHei"/>
                 <a:ea typeface="Microsoft YaHei"/>
+                <a:cs typeface="Microsoft YaHei"/>
               </a:rPr>
               <a:t>条件自治</a:t>
             </a:r>
@@ -4164,8 +4311,8 @@
         </p:nvSpPr>
         <p:spPr>
           <a:xfrm>
-            <a:off x="4064000" y="3759199"/>
-            <a:ext cx="1390650" cy="609600"/>
+            <a:off x="4014787" y="3759199"/>
+            <a:ext cx="1489075" cy="609600"/>
           </a:xfrm>
           <a:prstGeom prst="rect">
             <a:avLst/>
@@ -4182,14 +4329,21 @@
               <a:lnSpc>
                 <a:spcPct val="112000"/>
               </a:lnSpc>
-            </a:pPr>
-            <a:r>
-              <a:rPr sz="1050" b="0" i="0">
+              <a:spcBef>
+                <a:spcPts val="0"/>
+              </a:spcBef>
+              <a:spcAft>
+                <a:spcPts val="0"/>
+              </a:spcAft>
+            </a:pPr>
+            <a:r>
+              <a:rPr sz="1050" b="0" i="0" lang="zh-CN" altLang="zh-CN">
                 <a:solidFill>
                   <a:srgbClr val="FFFFFF"/>
                 </a:solidFill>
                 <a:latin typeface="Microsoft YaHei"/>
                 <a:ea typeface="Microsoft YaHei"/>
+                <a:cs typeface="Microsoft YaHei"/>
               </a:rPr>
               <a:t>意图驱动闭环: 已知场景自动决策、自动执行</a:t>
             </a:r>
@@ -4204,8 +4358,8 @@
         </p:nvSpPr>
         <p:spPr>
           <a:xfrm>
-            <a:off x="4619625" y="4527550"/>
-            <a:ext cx="279400" cy="279400"/>
+            <a:off x="4545012" y="4434967"/>
+            <a:ext cx="428625" cy="464566"/>
           </a:xfrm>
           <a:prstGeom prst="rect">
             <a:avLst/>
@@ -4222,14 +4376,21 @@
               <a:lnSpc>
                 <a:spcPct val="112000"/>
               </a:lnSpc>
-            </a:pPr>
-            <a:r>
-              <a:rPr sz="2800" b="1" i="0">
+              <a:spcBef>
+                <a:spcPts val="0"/>
+              </a:spcBef>
+              <a:spcAft>
+                <a:spcPts val="0"/>
+              </a:spcAft>
+            </a:pPr>
+            <a:r>
+              <a:rPr sz="2800" b="1" i="0" lang="zh-CN" altLang="zh-CN">
                 <a:solidFill>
                   <a:srgbClr val="FFFFFF"/>
                 </a:solidFill>
                 <a:latin typeface="Microsoft YaHei"/>
                 <a:ea typeface="Microsoft YaHei"/>
+                <a:cs typeface="Microsoft YaHei"/>
               </a:rPr>
               <a:t>⚙</a:t>
             </a:r>
@@ -4262,14 +4423,21 @@
               <a:lnSpc>
                 <a:spcPct val="112000"/>
               </a:lnSpc>
-            </a:pPr>
-            <a:r>
-              <a:rPr sz="900" b="0" i="0">
+              <a:spcBef>
+                <a:spcPts val="0"/>
+              </a:spcBef>
+              <a:spcAft>
+                <a:spcPts val="0"/>
+              </a:spcAft>
+            </a:pPr>
+            <a:r>
+              <a:rPr sz="900" b="0" i="0" lang="zh-CN" altLang="zh-CN">
                 <a:solidFill>
                   <a:srgbClr val="FFFFFF"/>
                 </a:solidFill>
                 <a:latin typeface="Microsoft YaHei"/>
                 <a:ea typeface="Microsoft YaHei"/>
+                <a:cs typeface="Microsoft YaHei"/>
               </a:rPr>
               <a:t>现网渗透率</a:t>
             </a:r>
@@ -4284,8 +4452,8 @@
         </p:nvSpPr>
         <p:spPr>
           <a:xfrm>
-            <a:off x="3975100" y="5359400"/>
-            <a:ext cx="1568450" cy="254000"/>
+            <a:off x="3975100" y="5309108"/>
+            <a:ext cx="1568450" cy="354584"/>
           </a:xfrm>
           <a:prstGeom prst="rect">
             <a:avLst/>
@@ -4302,14 +4470,21 @@
               <a:lnSpc>
                 <a:spcPct val="112000"/>
               </a:lnSpc>
-            </a:pPr>
-            <a:r>
-              <a:rPr sz="2100" b="1" i="0">
+              <a:spcBef>
+                <a:spcPts val="0"/>
+              </a:spcBef>
+              <a:spcAft>
+                <a:spcPts val="0"/>
+              </a:spcAft>
+            </a:pPr>
+            <a:r>
+              <a:rPr sz="2100" b="1" i="0" lang="zh-CN" altLang="zh-CN">
                 <a:solidFill>
                   <a:srgbClr val="FFFFFF"/>
                 </a:solidFill>
                 <a:latin typeface="Microsoft YaHei"/>
                 <a:ea typeface="Microsoft YaHei"/>
+                <a:cs typeface="Microsoft YaHei"/>
               </a:rPr>
               <a:t>30%</a:t>
             </a:r>
@@ -4342,14 +4517,21 @@
               <a:lnSpc>
                 <a:spcPct val="112000"/>
               </a:lnSpc>
-            </a:pPr>
-            <a:r>
-              <a:rPr sz="1000" b="0" i="0">
+              <a:spcBef>
+                <a:spcPts val="0"/>
+              </a:spcBef>
+              <a:spcAft>
+                <a:spcPts val="0"/>
+              </a:spcAft>
+            </a:pPr>
+            <a:r>
+              <a:rPr sz="1000" b="0" i="0" lang="zh-CN" altLang="zh-CN">
                 <a:solidFill>
                   <a:srgbClr val="595959"/>
                 </a:solidFill>
                 <a:latin typeface="Microsoft YaHei"/>
                 <a:ea typeface="Microsoft YaHei"/>
+                <a:cs typeface="Microsoft YaHei"/>
               </a:rPr>
               <a:t>2025</a:t>
             </a:r>
@@ -4396,7 +4578,14 @@
           <a:bodyPr rtlCol="0" anchor="ctr"/>
           <a:lstStyle/>
           <a:p>
-            <a:pPr algn="ctr"/>
+            <a:pPr algn="ctr">
+              <a:spcBef>
+                <a:spcPts val="0"/>
+              </a:spcBef>
+              <a:spcAft>
+                <a:spcPts val="0"/>
+              </a:spcAft>
+            </a:pPr>
           </a:p>
         </p:txBody>
       </p:sp>
@@ -4408,8 +4597,8 @@
         </p:nvSpPr>
         <p:spPr>
           <a:xfrm>
-            <a:off x="5581650" y="2476500"/>
-            <a:ext cx="1568450" cy="254000"/>
+            <a:off x="5581650" y="2402459"/>
+            <a:ext cx="1568450" cy="402082"/>
           </a:xfrm>
           <a:prstGeom prst="rect">
             <a:avLst/>
@@ -4426,14 +4615,21 @@
               <a:lnSpc>
                 <a:spcPct val="112000"/>
               </a:lnSpc>
-            </a:pPr>
-            <a:r>
-              <a:rPr sz="2400" b="1" i="0">
+              <a:spcBef>
+                <a:spcPts val="0"/>
+              </a:spcBef>
+              <a:spcAft>
+                <a:spcPts val="0"/>
+              </a:spcAft>
+            </a:pPr>
+            <a:r>
+              <a:rPr sz="2400" b="1" i="0" lang="zh-CN" altLang="zh-CN">
                 <a:solidFill>
                   <a:srgbClr val="FFFFFF"/>
                 </a:solidFill>
                 <a:latin typeface="Microsoft YaHei"/>
                 <a:ea typeface="Microsoft YaHei"/>
+                <a:cs typeface="Microsoft YaHei"/>
               </a:rPr>
               <a:t>L4</a:t>
             </a:r>
@@ -4448,8 +4644,8 @@
         </p:nvSpPr>
         <p:spPr>
           <a:xfrm>
-            <a:off x="5645150" y="2743200"/>
-            <a:ext cx="1441450" cy="203200"/>
+            <a:off x="5645150" y="2726817"/>
+            <a:ext cx="1441450" cy="235965"/>
           </a:xfrm>
           <a:prstGeom prst="rect">
             <a:avLst/>
@@ -4466,14 +4662,21 @@
               <a:lnSpc>
                 <a:spcPct val="112000"/>
               </a:lnSpc>
-            </a:pPr>
-            <a:r>
-              <a:rPr sz="1350" b="1" i="0">
+              <a:spcBef>
+                <a:spcPts val="0"/>
+              </a:spcBef>
+              <a:spcAft>
+                <a:spcPts val="0"/>
+              </a:spcAft>
+            </a:pPr>
+            <a:r>
+              <a:rPr sz="1350" b="1" i="0" lang="zh-CN" altLang="zh-CN">
                 <a:solidFill>
                   <a:srgbClr val="FFFFFF"/>
                 </a:solidFill>
                 <a:latin typeface="Microsoft YaHei"/>
                 <a:ea typeface="Microsoft YaHei"/>
+                <a:cs typeface="Microsoft YaHei"/>
               </a:rPr>
               <a:t>高度自治</a:t>
             </a:r>
@@ -4506,14 +4709,21 @@
               <a:lnSpc>
                 <a:spcPct val="112000"/>
               </a:lnSpc>
-            </a:pPr>
-            <a:r>
-              <a:rPr sz="1050" b="0" i="0">
+              <a:spcBef>
+                <a:spcPts val="0"/>
+              </a:spcBef>
+              <a:spcAft>
+                <a:spcPts val="0"/>
+              </a:spcAft>
+            </a:pPr>
+            <a:r>
+              <a:rPr sz="1050" b="0" i="0" lang="zh-CN" altLang="zh-CN">
                 <a:solidFill>
                   <a:srgbClr val="FFFFFF"/>
                 </a:solidFill>
                 <a:latin typeface="Microsoft YaHei"/>
                 <a:ea typeface="Microsoft YaHei"/>
+                <a:cs typeface="Microsoft YaHei"/>
               </a:rPr>
               <a:t>全场景预测性自优化, 风险提前识别与规避, 人员仅处理少量例外事件, 跨域协同决策由系统自主完成, 例外工单占比 &lt;5%</a:t>
             </a:r>
@@ -4528,8 +4738,8 @@
         </p:nvSpPr>
         <p:spPr>
           <a:xfrm>
-            <a:off x="6226175" y="4508500"/>
-            <a:ext cx="279400" cy="279400"/>
+            <a:off x="6083300" y="4431728"/>
+            <a:ext cx="565150" cy="432943"/>
           </a:xfrm>
           <a:prstGeom prst="rect">
             <a:avLst/>
@@ -4546,14 +4756,21 @@
               <a:lnSpc>
                 <a:spcPct val="112000"/>
               </a:lnSpc>
-            </a:pPr>
-            <a:r>
-              <a:rPr sz="2600" b="1" i="0">
+              <a:spcBef>
+                <a:spcPts val="0"/>
+              </a:spcBef>
+              <a:spcAft>
+                <a:spcPts val="0"/>
+              </a:spcAft>
+            </a:pPr>
+            <a:r>
+              <a:rPr sz="2600" b="1" i="0" lang="zh-CN" altLang="zh-CN">
                 <a:solidFill>
                   <a:srgbClr val="FFFFFF"/>
                 </a:solidFill>
                 <a:latin typeface="Microsoft YaHei"/>
                 <a:ea typeface="Microsoft YaHei"/>
+                <a:cs typeface="Microsoft YaHei"/>
               </a:rPr>
               <a:t>⚡</a:t>
             </a:r>
@@ -4586,14 +4803,21 @@
               <a:lnSpc>
                 <a:spcPct val="112000"/>
               </a:lnSpc>
-            </a:pPr>
-            <a:r>
-              <a:rPr sz="900" b="0" i="0">
+              <a:spcBef>
+                <a:spcPts val="0"/>
+              </a:spcBef>
+              <a:spcAft>
+                <a:spcPts val="0"/>
+              </a:spcAft>
+            </a:pPr>
+            <a:r>
+              <a:rPr sz="900" b="0" i="0" lang="zh-CN" altLang="zh-CN">
                 <a:solidFill>
                   <a:srgbClr val="FFFFFF"/>
                 </a:solidFill>
                 <a:latin typeface="Microsoft YaHei"/>
                 <a:ea typeface="Microsoft YaHei"/>
+                <a:cs typeface="Microsoft YaHei"/>
               </a:rPr>
               <a:t>现网渗透率</a:t>
             </a:r>
@@ -4608,8 +4832,8 @@
         </p:nvSpPr>
         <p:spPr>
           <a:xfrm>
-            <a:off x="5581650" y="5359400"/>
-            <a:ext cx="1568450" cy="254000"/>
+            <a:off x="5581650" y="5309108"/>
+            <a:ext cx="1568450" cy="354584"/>
           </a:xfrm>
           <a:prstGeom prst="rect">
             <a:avLst/>
@@ -4626,14 +4850,21 @@
               <a:lnSpc>
                 <a:spcPct val="112000"/>
               </a:lnSpc>
-            </a:pPr>
-            <a:r>
-              <a:rPr sz="2100" b="1" i="0">
+              <a:spcBef>
+                <a:spcPts val="0"/>
+              </a:spcBef>
+              <a:spcAft>
+                <a:spcPts val="0"/>
+              </a:spcAft>
+            </a:pPr>
+            <a:r>
+              <a:rPr sz="2100" b="1" i="0" lang="zh-CN" altLang="zh-CN">
                 <a:solidFill>
                   <a:srgbClr val="FFFFFF"/>
                 </a:solidFill>
                 <a:latin typeface="Microsoft YaHei"/>
                 <a:ea typeface="Microsoft YaHei"/>
+                <a:cs typeface="Microsoft YaHei"/>
               </a:rPr>
               <a:t>8%</a:t>
             </a:r>
@@ -4666,14 +4897,21 @@
               <a:lnSpc>
                 <a:spcPct val="112000"/>
               </a:lnSpc>
-            </a:pPr>
-            <a:r>
-              <a:rPr sz="1000" b="0" i="0">
+              <a:spcBef>
+                <a:spcPts val="0"/>
+              </a:spcBef>
+              <a:spcAft>
+                <a:spcPts val="0"/>
+              </a:spcAft>
+            </a:pPr>
+            <a:r>
+              <a:rPr sz="1000" b="0" i="0" lang="zh-CN" altLang="zh-CN">
                 <a:solidFill>
                   <a:srgbClr val="595959"/>
                 </a:solidFill>
                 <a:latin typeface="Microsoft YaHei"/>
                 <a:ea typeface="Microsoft YaHei"/>
+                <a:cs typeface="Microsoft YaHei"/>
               </a:rPr>
               <a:t>2026-27</a:t>
             </a:r>
@@ -4720,7 +4958,14 @@
           <a:bodyPr rtlCol="0" anchor="ctr"/>
           <a:lstStyle/>
           <a:p>
-            <a:pPr algn="ctr"/>
+            <a:pPr algn="ctr">
+              <a:spcBef>
+                <a:spcPts val="0"/>
+              </a:spcBef>
+              <a:spcAft>
+                <a:spcPts val="0"/>
+              </a:spcAft>
+            </a:pPr>
           </a:p>
         </p:txBody>
       </p:sp>
@@ -4732,8 +4977,8 @@
         </p:nvSpPr>
         <p:spPr>
           <a:xfrm>
-            <a:off x="7188200" y="1714500"/>
-            <a:ext cx="1568450" cy="254000"/>
+            <a:off x="7188200" y="1640458"/>
+            <a:ext cx="1568450" cy="402082"/>
           </a:xfrm>
           <a:prstGeom prst="rect">
             <a:avLst/>
@@ -4750,14 +4995,21 @@
               <a:lnSpc>
                 <a:spcPct val="112000"/>
               </a:lnSpc>
-            </a:pPr>
-            <a:r>
-              <a:rPr sz="2400" b="1" i="0">
+              <a:spcBef>
+                <a:spcPts val="0"/>
+              </a:spcBef>
+              <a:spcAft>
+                <a:spcPts val="0"/>
+              </a:spcAft>
+            </a:pPr>
+            <a:r>
+              <a:rPr sz="2400" b="1" i="0" lang="zh-CN" altLang="zh-CN">
                 <a:solidFill>
                   <a:srgbClr val="FFFFFF"/>
                 </a:solidFill>
                 <a:latin typeface="Microsoft YaHei"/>
                 <a:ea typeface="Microsoft YaHei"/>
+                <a:cs typeface="Microsoft YaHei"/>
               </a:rPr>
               <a:t>L5</a:t>
             </a:r>
@@ -4772,8 +5024,8 @@
         </p:nvSpPr>
         <p:spPr>
           <a:xfrm>
-            <a:off x="7251700" y="1981199"/>
-            <a:ext cx="1441450" cy="203200"/>
+            <a:off x="7251700" y="1964816"/>
+            <a:ext cx="1441450" cy="235965"/>
           </a:xfrm>
           <a:prstGeom prst="rect">
             <a:avLst/>
@@ -4790,14 +5042,21 @@
               <a:lnSpc>
                 <a:spcPct val="112000"/>
               </a:lnSpc>
-            </a:pPr>
-            <a:r>
-              <a:rPr sz="1350" b="1" i="0">
+              <a:spcBef>
+                <a:spcPts val="0"/>
+              </a:spcBef>
+              <a:spcAft>
+                <a:spcPts val="0"/>
+              </a:spcAft>
+            </a:pPr>
+            <a:r>
+              <a:rPr sz="1350" b="1" i="0" lang="zh-CN" altLang="zh-CN">
                 <a:solidFill>
                   <a:srgbClr val="FFFFFF"/>
                 </a:solidFill>
                 <a:latin typeface="Microsoft YaHei"/>
                 <a:ea typeface="Microsoft YaHei"/>
+                <a:cs typeface="Microsoft YaHei"/>
               </a:rPr>
               <a:t>完全自治</a:t>
             </a:r>
@@ -4830,14 +5089,21 @@
               <a:lnSpc>
                 <a:spcPct val="112000"/>
               </a:lnSpc>
-            </a:pPr>
-            <a:r>
-              <a:rPr sz="1050" b="0" i="0">
+              <a:spcBef>
+                <a:spcPts val="0"/>
+              </a:spcBef>
+              <a:spcAft>
+                <a:spcPts val="0"/>
+              </a:spcAft>
+            </a:pPr>
+            <a:r>
+              <a:rPr sz="1050" b="0" i="0" lang="zh-CN" altLang="zh-CN">
                 <a:solidFill>
                   <a:srgbClr val="FFFFFF"/>
                 </a:solidFill>
                 <a:latin typeface="Microsoft YaHei"/>
                 <a:ea typeface="Microsoft YaHei"/>
+                <a:cs typeface="Microsoft YaHei"/>
               </a:rPr>
               <a:t>跨域自学习自演进, 网络全生命周期零人工干预, 新业务开通、故障恢复、能效优化全部自治完成, 体验劣化自动预防</a:t>
             </a:r>
@@ -4852,8 +5118,8 @@
         </p:nvSpPr>
         <p:spPr>
           <a:xfrm>
-            <a:off x="7832724" y="3613150"/>
-            <a:ext cx="279400" cy="279400"/>
+            <a:off x="7753349" y="3520566"/>
+            <a:ext cx="438150" cy="464566"/>
           </a:xfrm>
           <a:prstGeom prst="rect">
             <a:avLst/>
@@ -4870,14 +5136,21 @@
               <a:lnSpc>
                 <a:spcPct val="112000"/>
               </a:lnSpc>
-            </a:pPr>
-            <a:r>
-              <a:rPr sz="2800" b="1" i="0">
+              <a:spcBef>
+                <a:spcPts val="0"/>
+              </a:spcBef>
+              <a:spcAft>
+                <a:spcPts val="0"/>
+              </a:spcAft>
+            </a:pPr>
+            <a:r>
+              <a:rPr sz="2800" b="1" i="0" lang="zh-CN" altLang="zh-CN">
                 <a:solidFill>
                   <a:srgbClr val="FFFFFF"/>
                 </a:solidFill>
                 <a:latin typeface="Microsoft YaHei"/>
                 <a:ea typeface="Microsoft YaHei"/>
+                <a:cs typeface="Microsoft YaHei"/>
               </a:rPr>
               <a:t>☁</a:t>
             </a:r>
@@ -4910,14 +5183,21 @@
               <a:lnSpc>
                 <a:spcPct val="112000"/>
               </a:lnSpc>
-            </a:pPr>
-            <a:r>
-              <a:rPr sz="900" b="0" i="0">
+              <a:spcBef>
+                <a:spcPts val="0"/>
+              </a:spcBef>
+              <a:spcAft>
+                <a:spcPts val="0"/>
+              </a:spcAft>
+            </a:pPr>
+            <a:r>
+              <a:rPr sz="900" b="0" i="0" lang="zh-CN" altLang="zh-CN">
                 <a:solidFill>
                   <a:srgbClr val="FFFFFF"/>
                 </a:solidFill>
                 <a:latin typeface="Microsoft YaHei"/>
                 <a:ea typeface="Microsoft YaHei"/>
+                <a:cs typeface="Microsoft YaHei"/>
               </a:rPr>
               <a:t>现网渗透率</a:t>
             </a:r>
@@ -4932,8 +5212,8 @@
         </p:nvSpPr>
         <p:spPr>
           <a:xfrm>
-            <a:off x="7188200" y="5359400"/>
-            <a:ext cx="1568450" cy="254000"/>
+            <a:off x="7188200" y="5309108"/>
+            <a:ext cx="1568450" cy="354584"/>
           </a:xfrm>
           <a:prstGeom prst="rect">
             <a:avLst/>
@@ -4950,14 +5230,21 @@
               <a:lnSpc>
                 <a:spcPct val="112000"/>
               </a:lnSpc>
-            </a:pPr>
-            <a:r>
-              <a:rPr sz="2100" b="1" i="0">
+              <a:spcBef>
+                <a:spcPts val="0"/>
+              </a:spcBef>
+              <a:spcAft>
+                <a:spcPts val="0"/>
+              </a:spcAft>
+            </a:pPr>
+            <a:r>
+              <a:rPr sz="2100" b="1" i="0" lang="zh-CN" altLang="zh-CN">
                 <a:solidFill>
                   <a:srgbClr val="FFFFFF"/>
                 </a:solidFill>
                 <a:latin typeface="Microsoft YaHei"/>
                 <a:ea typeface="Microsoft YaHei"/>
+                <a:cs typeface="Microsoft YaHei"/>
               </a:rPr>
               <a:t>TBD</a:t>
             </a:r>
@@ -4990,14 +5277,21 @@
               <a:lnSpc>
                 <a:spcPct val="112000"/>
               </a:lnSpc>
-            </a:pPr>
-            <a:r>
-              <a:rPr sz="1000" b="0" i="0">
+              <a:spcBef>
+                <a:spcPts val="0"/>
+              </a:spcBef>
+              <a:spcAft>
+                <a:spcPts val="0"/>
+              </a:spcAft>
+            </a:pPr>
+            <a:r>
+              <a:rPr sz="1000" b="0" i="0" lang="zh-CN" altLang="zh-CN">
                 <a:solidFill>
                   <a:srgbClr val="595959"/>
                 </a:solidFill>
                 <a:latin typeface="Microsoft YaHei"/>
                 <a:ea typeface="Microsoft YaHei"/>
+                <a:cs typeface="Microsoft YaHei"/>
               </a:rPr>
               <a:t>2028+</a:t>
             </a:r>
@@ -5030,14 +5324,21 @@
               <a:lnSpc>
                 <a:spcPct val="130000"/>
               </a:lnSpc>
-            </a:pPr>
-            <a:r>
-              <a:rPr sz="950" b="0" i="0">
+              <a:spcBef>
+                <a:spcPts val="0"/>
+              </a:spcBef>
+              <a:spcAft>
+                <a:spcPts val="0"/>
+              </a:spcAft>
+            </a:pPr>
+            <a:r>
+              <a:rPr sz="950" b="0" i="0" lang="zh-CN" altLang="zh-CN">
                 <a:solidFill>
                   <a:srgbClr val="FFFFFF"/>
                 </a:solidFill>
                 <a:latin typeface="Microsoft YaHei"/>
                 <a:ea typeface="Microsoft YaHei"/>
+                <a:cs typeface="Microsoft YaHei"/>
               </a:rPr>
               <a:t>网络具备自学习与自演进能力, 策略自动生成、模型在线进化, 全程零接触无人值守, 跨域端到端协同自治, 体验劣化自动预防。</a:t>
             </a:r>
@@ -5085,7 +5386,14 @@
           <a:bodyPr rtlCol="0" anchor="ctr"/>
           <a:lstStyle/>
           <a:p>
-            <a:pPr algn="ctr"/>
+            <a:pPr algn="ctr">
+              <a:spcBef>
+                <a:spcPts val="0"/>
+              </a:spcBef>
+              <a:spcAft>
+                <a:spcPts val="0"/>
+              </a:spcAft>
+            </a:pPr>
           </a:p>
         </p:txBody>
       </p:sp>
@@ -5132,7 +5440,14 @@
           <a:bodyPr rtlCol="0" anchor="ctr"/>
           <a:lstStyle/>
           <a:p>
-            <a:pPr algn="ctr"/>
+            <a:pPr algn="ctr">
+              <a:spcBef>
+                <a:spcPts val="0"/>
+              </a:spcBef>
+              <a:spcAft>
+                <a:spcPts val="0"/>
+              </a:spcAft>
+            </a:pPr>
           </a:p>
         </p:txBody>
       </p:sp>
@@ -5162,14 +5477,21 @@
               <a:lnSpc>
                 <a:spcPct val="112000"/>
               </a:lnSpc>
-            </a:pPr>
-            <a:r>
-              <a:rPr sz="1300" b="1" i="0">
+              <a:spcBef>
+                <a:spcPts val="0"/>
+              </a:spcBef>
+              <a:spcAft>
+                <a:spcPts val="0"/>
+              </a:spcAft>
+            </a:pPr>
+            <a:r>
+              <a:rPr sz="1300" b="1" i="0" lang="zh-CN" altLang="zh-CN">
                 <a:solidFill>
                   <a:srgbClr val="B90A0A"/>
                 </a:solidFill>
                 <a:latin typeface="Microsoft YaHei"/>
                 <a:ea typeface="Microsoft YaHei"/>
+                <a:cs typeface="Microsoft YaHei"/>
               </a:rPr>
               <a:t>当前: L3 条件自治</a:t>
             </a:r>
@@ -5221,8 +5543,8 @@
         </p:nvSpPr>
         <p:spPr>
           <a:xfrm>
-            <a:off x="825500" y="876300"/>
-            <a:ext cx="2730500" cy="177800"/>
+            <a:off x="825500" y="859091"/>
+            <a:ext cx="2730500" cy="212217"/>
           </a:xfrm>
           <a:prstGeom prst="rect">
             <a:avLst/>
@@ -5239,14 +5561,21 @@
               <a:lnSpc>
                 <a:spcPct val="112000"/>
               </a:lnSpc>
-            </a:pPr>
-            <a:r>
-              <a:rPr sz="1200" b="1" i="0">
+              <a:spcBef>
+                <a:spcPts val="0"/>
+              </a:spcBef>
+              <a:spcAft>
+                <a:spcPts val="0"/>
+              </a:spcAft>
+            </a:pPr>
+            <a:r>
+              <a:rPr sz="1200" b="1" i="0" lang="zh-CN" altLang="zh-CN">
                 <a:solidFill>
                   <a:srgbClr val="1F4E79"/>
                 </a:solidFill>
                 <a:latin typeface="Microsoft YaHei"/>
                 <a:ea typeface="Microsoft YaHei"/>
+                <a:cs typeface="Microsoft YaHei"/>
               </a:rPr>
               <a:t>全网自动化率趋势 (%)</a:t>
             </a:r>
@@ -5509,7 +5838,14 @@
           <a:bodyPr rtlCol="0" anchor="ctr"/>
           <a:lstStyle/>
           <a:p>
-            <a:pPr algn="ctr"/>
+            <a:pPr algn="ctr">
+              <a:spcBef>
+                <a:spcPts val="0"/>
+              </a:spcBef>
+              <a:spcAft>
+                <a:spcPts val="0"/>
+              </a:spcAft>
+            </a:pPr>
           </a:p>
         </p:txBody>
       </p:sp>
@@ -5521,8 +5857,8 @@
         </p:nvSpPr>
         <p:spPr>
           <a:xfrm>
-            <a:off x="927100" y="1900115"/>
-            <a:ext cx="304800" cy="127000"/>
+            <a:off x="927100" y="1877318"/>
+            <a:ext cx="304800" cy="172593"/>
           </a:xfrm>
           <a:prstGeom prst="rect">
             <a:avLst/>
@@ -5539,14 +5875,21 @@
               <a:lnSpc>
                 <a:spcPct val="112000"/>
               </a:lnSpc>
-            </a:pPr>
-            <a:r>
-              <a:rPr sz="950" b="0" i="0">
+              <a:spcBef>
+                <a:spcPts val="0"/>
+              </a:spcBef>
+              <a:spcAft>
+                <a:spcPts val="0"/>
+              </a:spcAft>
+            </a:pPr>
+            <a:r>
+              <a:rPr sz="950" b="0" i="0" lang="zh-CN" altLang="zh-CN">
                 <a:solidFill>
                   <a:srgbClr val="262626"/>
                 </a:solidFill>
                 <a:latin typeface="Microsoft YaHei"/>
                 <a:ea typeface="Microsoft YaHei"/>
+                <a:cs typeface="Microsoft YaHei"/>
               </a:rPr>
               <a:t>20</a:t>
             </a:r>
@@ -5561,8 +5904,8 @@
         </p:nvSpPr>
         <p:spPr>
           <a:xfrm>
-            <a:off x="889000" y="2324100"/>
-            <a:ext cx="381000" cy="139700"/>
+            <a:off x="889000" y="2307653"/>
+            <a:ext cx="381000" cy="172593"/>
           </a:xfrm>
           <a:prstGeom prst="rect">
             <a:avLst/>
@@ -5579,14 +5922,21 @@
               <a:lnSpc>
                 <a:spcPct val="112000"/>
               </a:lnSpc>
-            </a:pPr>
-            <a:r>
-              <a:rPr sz="950" b="0" i="0">
+              <a:spcBef>
+                <a:spcPts val="0"/>
+              </a:spcBef>
+              <a:spcAft>
+                <a:spcPts val="0"/>
+              </a:spcAft>
+            </a:pPr>
+            <a:r>
+              <a:rPr sz="950" b="0" i="0" lang="zh-CN" altLang="zh-CN">
                 <a:solidFill>
                   <a:srgbClr val="595959"/>
                 </a:solidFill>
                 <a:latin typeface="Microsoft YaHei"/>
                 <a:ea typeface="Microsoft YaHei"/>
+                <a:cs typeface="Microsoft YaHei"/>
               </a:rPr>
               <a:t>2023</a:t>
             </a:r>
@@ -5633,7 +5983,14 @@
           <a:bodyPr rtlCol="0" anchor="ctr"/>
           <a:lstStyle/>
           <a:p>
-            <a:pPr algn="ctr"/>
+            <a:pPr algn="ctr">
+              <a:spcBef>
+                <a:spcPts val="0"/>
+              </a:spcBef>
+              <a:spcAft>
+                <a:spcPts val="0"/>
+              </a:spcAft>
+            </a:pPr>
           </a:p>
         </p:txBody>
       </p:sp>
@@ -5645,8 +6002,8 @@
         </p:nvSpPr>
         <p:spPr>
           <a:xfrm>
-            <a:off x="1495425" y="1753576"/>
-            <a:ext cx="304800" cy="127000"/>
+            <a:off x="1495425" y="1730779"/>
+            <a:ext cx="304800" cy="172593"/>
           </a:xfrm>
           <a:prstGeom prst="rect">
             <a:avLst/>
@@ -5663,14 +6020,21 @@
               <a:lnSpc>
                 <a:spcPct val="112000"/>
               </a:lnSpc>
-            </a:pPr>
-            <a:r>
-              <a:rPr sz="950" b="0" i="0">
+              <a:spcBef>
+                <a:spcPts val="0"/>
+              </a:spcBef>
+              <a:spcAft>
+                <a:spcPts val="0"/>
+              </a:spcAft>
+            </a:pPr>
+            <a:r>
+              <a:rPr sz="950" b="0" i="0" lang="zh-CN" altLang="zh-CN">
                 <a:solidFill>
                   <a:srgbClr val="262626"/>
                 </a:solidFill>
                 <a:latin typeface="Microsoft YaHei"/>
                 <a:ea typeface="Microsoft YaHei"/>
+                <a:cs typeface="Microsoft YaHei"/>
               </a:rPr>
               <a:t>35</a:t>
             </a:r>
@@ -5685,8 +6049,8 @@
         </p:nvSpPr>
         <p:spPr>
           <a:xfrm>
-            <a:off x="1457325" y="2324100"/>
-            <a:ext cx="381000" cy="139700"/>
+            <a:off x="1457325" y="2307653"/>
+            <a:ext cx="381000" cy="172593"/>
           </a:xfrm>
           <a:prstGeom prst="rect">
             <a:avLst/>
@@ -5703,14 +6067,21 @@
               <a:lnSpc>
                 <a:spcPct val="112000"/>
               </a:lnSpc>
-            </a:pPr>
-            <a:r>
-              <a:rPr sz="950" b="0" i="0">
+              <a:spcBef>
+                <a:spcPts val="0"/>
+              </a:spcBef>
+              <a:spcAft>
+                <a:spcPts val="0"/>
+              </a:spcAft>
+            </a:pPr>
+            <a:r>
+              <a:rPr sz="950" b="0" i="0" lang="zh-CN" altLang="zh-CN">
                 <a:solidFill>
                   <a:srgbClr val="595959"/>
                 </a:solidFill>
                 <a:latin typeface="Microsoft YaHei"/>
                 <a:ea typeface="Microsoft YaHei"/>
+                <a:cs typeface="Microsoft YaHei"/>
               </a:rPr>
               <a:t>2024</a:t>
             </a:r>
@@ -5757,7 +6128,14 @@
           <a:bodyPr rtlCol="0" anchor="ctr"/>
           <a:lstStyle/>
           <a:p>
-            <a:pPr algn="ctr"/>
+            <a:pPr algn="ctr">
+              <a:spcBef>
+                <a:spcPts val="0"/>
+              </a:spcBef>
+              <a:spcAft>
+                <a:spcPts val="0"/>
+              </a:spcAft>
+            </a:pPr>
           </a:p>
         </p:txBody>
       </p:sp>
@@ -5769,8 +6147,8 @@
         </p:nvSpPr>
         <p:spPr>
           <a:xfrm>
-            <a:off x="2063750" y="1558192"/>
-            <a:ext cx="304800" cy="127000"/>
+            <a:off x="2063750" y="1535395"/>
+            <a:ext cx="304800" cy="172593"/>
           </a:xfrm>
           <a:prstGeom prst="rect">
             <a:avLst/>
@@ -5787,14 +6165,21 @@
               <a:lnSpc>
                 <a:spcPct val="112000"/>
               </a:lnSpc>
-            </a:pPr>
-            <a:r>
-              <a:rPr sz="950" b="0" i="0">
+              <a:spcBef>
+                <a:spcPts val="0"/>
+              </a:spcBef>
+              <a:spcAft>
+                <a:spcPts val="0"/>
+              </a:spcAft>
+            </a:pPr>
+            <a:r>
+              <a:rPr sz="950" b="0" i="0" lang="zh-CN" altLang="zh-CN">
                 <a:solidFill>
                   <a:srgbClr val="262626"/>
                 </a:solidFill>
                 <a:latin typeface="Microsoft YaHei"/>
                 <a:ea typeface="Microsoft YaHei"/>
+                <a:cs typeface="Microsoft YaHei"/>
               </a:rPr>
               <a:t>55</a:t>
             </a:r>
@@ -5809,8 +6194,8 @@
         </p:nvSpPr>
         <p:spPr>
           <a:xfrm>
-            <a:off x="2025650" y="2324100"/>
-            <a:ext cx="381000" cy="139700"/>
+            <a:off x="2025650" y="2307653"/>
+            <a:ext cx="381000" cy="172593"/>
           </a:xfrm>
           <a:prstGeom prst="rect">
             <a:avLst/>
@@ -5827,14 +6212,21 @@
               <a:lnSpc>
                 <a:spcPct val="112000"/>
               </a:lnSpc>
-            </a:pPr>
-            <a:r>
-              <a:rPr sz="950" b="0" i="0">
+              <a:spcBef>
+                <a:spcPts val="0"/>
+              </a:spcBef>
+              <a:spcAft>
+                <a:spcPts val="0"/>
+              </a:spcAft>
+            </a:pPr>
+            <a:r>
+              <a:rPr sz="950" b="0" i="0" lang="zh-CN" altLang="zh-CN">
                 <a:solidFill>
                   <a:srgbClr val="595959"/>
                 </a:solidFill>
                 <a:latin typeface="Microsoft YaHei"/>
                 <a:ea typeface="Microsoft YaHei"/>
+                <a:cs typeface="Microsoft YaHei"/>
               </a:rPr>
               <a:t>2025</a:t>
             </a:r>
@@ -5881,7 +6273,14 @@
           <a:bodyPr rtlCol="0" anchor="ctr"/>
           <a:lstStyle/>
           <a:p>
-            <a:pPr algn="ctr"/>
+            <a:pPr algn="ctr">
+              <a:spcBef>
+                <a:spcPts val="0"/>
+              </a:spcBef>
+              <a:spcAft>
+                <a:spcPts val="0"/>
+              </a:spcAft>
+            </a:pPr>
           </a:p>
         </p:txBody>
       </p:sp>
@@ -5893,8 +6292,8 @@
         </p:nvSpPr>
         <p:spPr>
           <a:xfrm>
-            <a:off x="2632075" y="1392115"/>
-            <a:ext cx="304800" cy="127000"/>
+            <a:off x="2632075" y="1369318"/>
+            <a:ext cx="304800" cy="172593"/>
           </a:xfrm>
           <a:prstGeom prst="rect">
             <a:avLst/>
@@ -5911,14 +6310,21 @@
               <a:lnSpc>
                 <a:spcPct val="112000"/>
               </a:lnSpc>
-            </a:pPr>
-            <a:r>
-              <a:rPr sz="950" b="0" i="0">
+              <a:spcBef>
+                <a:spcPts val="0"/>
+              </a:spcBef>
+              <a:spcAft>
+                <a:spcPts val="0"/>
+              </a:spcAft>
+            </a:pPr>
+            <a:r>
+              <a:rPr sz="950" b="0" i="0" lang="zh-CN" altLang="zh-CN">
                 <a:solidFill>
                   <a:srgbClr val="262626"/>
                 </a:solidFill>
                 <a:latin typeface="Microsoft YaHei"/>
                 <a:ea typeface="Microsoft YaHei"/>
+                <a:cs typeface="Microsoft YaHei"/>
               </a:rPr>
               <a:t>72</a:t>
             </a:r>
@@ -5933,8 +6339,8 @@
         </p:nvSpPr>
         <p:spPr>
           <a:xfrm>
-            <a:off x="2593975" y="2324100"/>
-            <a:ext cx="381000" cy="139700"/>
+            <a:off x="2593975" y="2307653"/>
+            <a:ext cx="381000" cy="172593"/>
           </a:xfrm>
           <a:prstGeom prst="rect">
             <a:avLst/>
@@ -5951,14 +6357,21 @@
               <a:lnSpc>
                 <a:spcPct val="112000"/>
               </a:lnSpc>
-            </a:pPr>
-            <a:r>
-              <a:rPr sz="950" b="0" i="0">
+              <a:spcBef>
+                <a:spcPts val="0"/>
+              </a:spcBef>
+              <a:spcAft>
+                <a:spcPts val="0"/>
+              </a:spcAft>
+            </a:pPr>
+            <a:r>
+              <a:rPr sz="950" b="0" i="0" lang="zh-CN" altLang="zh-CN">
                 <a:solidFill>
                   <a:srgbClr val="595959"/>
                 </a:solidFill>
                 <a:latin typeface="Microsoft YaHei"/>
                 <a:ea typeface="Microsoft YaHei"/>
+                <a:cs typeface="Microsoft YaHei"/>
               </a:rPr>
               <a:t>2026</a:t>
             </a:r>
@@ -6005,7 +6418,14 @@
           <a:bodyPr rtlCol="0" anchor="ctr"/>
           <a:lstStyle/>
           <a:p>
-            <a:pPr algn="ctr"/>
+            <a:pPr algn="ctr">
+              <a:spcBef>
+                <a:spcPts val="0"/>
+              </a:spcBef>
+              <a:spcAft>
+                <a:spcPts val="0"/>
+              </a:spcAft>
+            </a:pPr>
           </a:p>
         </p:txBody>
       </p:sp>
@@ -6017,8 +6437,8 @@
         </p:nvSpPr>
         <p:spPr>
           <a:xfrm>
-            <a:off x="3200400" y="1216269"/>
-            <a:ext cx="304800" cy="127000"/>
+            <a:off x="3200400" y="1193472"/>
+            <a:ext cx="304800" cy="172593"/>
           </a:xfrm>
           <a:prstGeom prst="rect">
             <a:avLst/>
@@ -6035,14 +6455,21 @@
               <a:lnSpc>
                 <a:spcPct val="112000"/>
               </a:lnSpc>
-            </a:pPr>
-            <a:r>
-              <a:rPr sz="950" b="0" i="0">
+              <a:spcBef>
+                <a:spcPts val="0"/>
+              </a:spcBef>
+              <a:spcAft>
+                <a:spcPts val="0"/>
+              </a:spcAft>
+            </a:pPr>
+            <a:r>
+              <a:rPr sz="950" b="0" i="0" lang="zh-CN" altLang="zh-CN">
                 <a:solidFill>
                   <a:srgbClr val="262626"/>
                 </a:solidFill>
                 <a:latin typeface="Microsoft YaHei"/>
                 <a:ea typeface="Microsoft YaHei"/>
+                <a:cs typeface="Microsoft YaHei"/>
               </a:rPr>
               <a:t>90</a:t>
             </a:r>
@@ -6057,8 +6484,8 @@
         </p:nvSpPr>
         <p:spPr>
           <a:xfrm>
-            <a:off x="3162300" y="2324100"/>
-            <a:ext cx="381000" cy="139700"/>
+            <a:off x="3162300" y="2307653"/>
+            <a:ext cx="381000" cy="172593"/>
           </a:xfrm>
           <a:prstGeom prst="rect">
             <a:avLst/>
@@ -6075,14 +6502,21 @@
               <a:lnSpc>
                 <a:spcPct val="112000"/>
               </a:lnSpc>
-            </a:pPr>
-            <a:r>
-              <a:rPr sz="950" b="0" i="0">
+              <a:spcBef>
+                <a:spcPts val="0"/>
+              </a:spcBef>
+              <a:spcAft>
+                <a:spcPts val="0"/>
+              </a:spcAft>
+            </a:pPr>
+            <a:r>
+              <a:rPr sz="950" b="0" i="0" lang="zh-CN" altLang="zh-CN">
                 <a:solidFill>
                   <a:srgbClr val="595959"/>
                 </a:solidFill>
                 <a:latin typeface="Microsoft YaHei"/>
                 <a:ea typeface="Microsoft YaHei"/>
+                <a:cs typeface="Microsoft YaHei"/>
               </a:rPr>
               <a:t>2027</a:t>
             </a:r>
@@ -6129,7 +6563,14 @@
           <a:bodyPr rtlCol="0" anchor="ctr"/>
           <a:lstStyle/>
           <a:p>
-            <a:pPr algn="ctr"/>
+            <a:pPr algn="ctr">
+              <a:spcBef>
+                <a:spcPts val="0"/>
+              </a:spcBef>
+              <a:spcAft>
+                <a:spcPts val="0"/>
+              </a:spcAft>
+            </a:pPr>
           </a:p>
         </p:txBody>
       </p:sp>
@@ -6159,14 +6600,21 @@
               <a:lnSpc>
                 <a:spcPct val="112000"/>
               </a:lnSpc>
-            </a:pPr>
-            <a:r>
-              <a:rPr sz="1100" b="1" i="0">
+              <a:spcBef>
+                <a:spcPts val="0"/>
+              </a:spcBef>
+              <a:spcAft>
+                <a:spcPts val="0"/>
+              </a:spcAft>
+            </a:pPr>
+            <a:r>
+              <a:rPr sz="1100" b="1" i="0" lang="zh-CN" altLang="zh-CN">
                 <a:solidFill>
                   <a:srgbClr val="262626"/>
                 </a:solidFill>
                 <a:latin typeface="Microsoft YaHei"/>
                 <a:ea typeface="Microsoft YaHei"/>
+                <a:cs typeface="Microsoft YaHei"/>
               </a:rPr>
               <a:t>人工干预 -55%</a:t>
             </a:r>
@@ -6213,7 +6661,14 @@
           <a:bodyPr rtlCol="0" anchor="ctr"/>
           <a:lstStyle/>
           <a:p>
-            <a:pPr algn="ctr"/>
+            <a:pPr algn="ctr">
+              <a:spcBef>
+                <a:spcPts val="0"/>
+              </a:spcBef>
+              <a:spcAft>
+                <a:spcPts val="0"/>
+              </a:spcAft>
+            </a:pPr>
           </a:p>
         </p:txBody>
       </p:sp>
@@ -6243,14 +6698,21 @@
               <a:lnSpc>
                 <a:spcPct val="112000"/>
               </a:lnSpc>
-            </a:pPr>
-            <a:r>
-              <a:rPr sz="1100" b="1" i="0">
+              <a:spcBef>
+                <a:spcPts val="0"/>
+              </a:spcBef>
+              <a:spcAft>
+                <a:spcPts val="0"/>
+              </a:spcAft>
+            </a:pPr>
+            <a:r>
+              <a:rPr sz="1100" b="1" i="0" lang="zh-CN" altLang="zh-CN">
                 <a:solidFill>
                   <a:srgbClr val="262626"/>
                 </a:solidFill>
                 <a:latin typeface="Microsoft YaHei"/>
                 <a:ea typeface="Microsoft YaHei"/>
+                <a:cs typeface="Microsoft YaHei"/>
               </a:rPr>
               <a:t>可用率 99.99%</a:t>
             </a:r>
@@ -6283,14 +6745,21 @@
               <a:lnSpc>
                 <a:spcPct val="112000"/>
               </a:lnSpc>
-            </a:pPr>
-            <a:r>
-              <a:rPr sz="1100" b="1" i="0">
+              <a:spcBef>
+                <a:spcPts val="0"/>
+              </a:spcBef>
+              <a:spcAft>
+                <a:spcPts val="0"/>
+              </a:spcAft>
+            </a:pPr>
+            <a:r>
+              <a:rPr sz="1100" b="1" i="0" lang="zh-CN" altLang="zh-CN">
                 <a:solidFill>
                   <a:srgbClr val="1F4E79"/>
                 </a:solidFill>
                 <a:latin typeface="Microsoft YaHei"/>
                 <a:ea typeface="Microsoft YaHei"/>
+                <a:cs typeface="Microsoft YaHei"/>
               </a:rPr>
               <a:t>演进三大驱动力</a:t>
             </a:r>
@@ -6323,14 +6792,21 @@
               <a:lnSpc>
                 <a:spcPct val="130000"/>
               </a:lnSpc>
-            </a:pPr>
-            <a:r>
-              <a:rPr sz="950" b="0" i="0">
+              <a:spcBef>
+                <a:spcPts val="0"/>
+              </a:spcBef>
+              <a:spcAft>
+                <a:spcPts val="0"/>
+              </a:spcAft>
+            </a:pPr>
+            <a:r>
+              <a:rPr sz="950" b="0" i="0" lang="zh-CN" altLang="zh-CN">
                 <a:solidFill>
                   <a:srgbClr val="595959"/>
                 </a:solidFill>
                 <a:latin typeface="Microsoft YaHei"/>
                 <a:ea typeface="Microsoft YaHei"/>
+                <a:cs typeface="Microsoft YaHei"/>
               </a:rPr>
               <a:t>大模型原生网元、数字孪生仿真底座与意图驱动闭环管理三股力量, 共同推动自治等级持续跃迁。</a:t>
             </a:r>
@@ -6401,14 +6877,21 @@
               <a:lnSpc>
                 <a:spcPct val="112000"/>
               </a:lnSpc>
-            </a:pPr>
-            <a:r>
-              <a:rPr sz="1100" b="0" i="0">
+              <a:spcBef>
+                <a:spcPts val="0"/>
+              </a:spcBef>
+              <a:spcAft>
+                <a:spcPts val="0"/>
+              </a:spcAft>
+            </a:pPr>
+            <a:r>
+              <a:rPr sz="1100" b="0" i="0" lang="zh-CN" altLang="zh-CN">
                 <a:solidFill>
                   <a:srgbClr val="595959"/>
                 </a:solidFill>
                 <a:latin typeface="Microsoft YaHei"/>
                 <a:ea typeface="Microsoft YaHei"/>
+                <a:cs typeface="Microsoft YaHei"/>
               </a:rPr>
               <a:t>自治能力持续演进</a:t>
             </a:r>
@@ -6458,7 +6941,14 @@
           <a:bodyPr rtlCol="0" anchor="ctr"/>
           <a:lstStyle/>
           <a:p>
-            <a:pPr algn="ctr"/>
+            <a:pPr algn="ctr">
+              <a:spcBef>
+                <a:spcPts val="0"/>
+              </a:spcBef>
+              <a:spcAft>
+                <a:spcPts val="0"/>
+              </a:spcAft>
+            </a:pPr>
           </a:p>
         </p:txBody>
       </p:sp>
@@ -6488,14 +6978,21 @@
               <a:lnSpc>
                 <a:spcPct val="112000"/>
               </a:lnSpc>
-            </a:pPr>
-            <a:r>
-              <a:rPr sz="1150" b="1" i="0">
+              <a:spcBef>
+                <a:spcPts val="0"/>
+              </a:spcBef>
+              <a:spcAft>
+                <a:spcPts val="0"/>
+              </a:spcAft>
+            </a:pPr>
+            <a:r>
+              <a:rPr sz="1150" b="1" i="0" lang="zh-CN" altLang="zh-CN">
                 <a:solidFill>
                   <a:srgbClr val="B90A0A"/>
                 </a:solidFill>
                 <a:latin typeface="Microsoft YaHei"/>
                 <a:ea typeface="Microsoft YaHei"/>
+                <a:cs typeface="Microsoft YaHei"/>
               </a:rPr>
               <a:t>2028: L4 规模商用</a:t>
             </a:r>
@@ -6544,7 +7041,14 @@
           <a:bodyPr rtlCol="0" anchor="ctr"/>
           <a:lstStyle/>
           <a:p>
-            <a:pPr algn="ctr"/>
+            <a:pPr algn="ctr">
+              <a:spcBef>
+                <a:spcPts val="0"/>
+              </a:spcBef>
+              <a:spcAft>
+                <a:spcPts val="0"/>
+              </a:spcAft>
+            </a:pPr>
           </a:p>
         </p:txBody>
       </p:sp>
@@ -6588,7 +7092,14 @@
           <a:bodyPr rtlCol="0" anchor="ctr"/>
           <a:lstStyle/>
           <a:p>
-            <a:pPr algn="ctr"/>
+            <a:pPr algn="ctr">
+              <a:spcBef>
+                <a:spcPts val="0"/>
+              </a:spcBef>
+              <a:spcAft>
+                <a:spcPts val="0"/>
+              </a:spcAft>
+            </a:pPr>
           </a:p>
         </p:txBody>
       </p:sp>
@@ -6632,7 +7143,14 @@
           <a:bodyPr rtlCol="0" anchor="ctr"/>
           <a:lstStyle/>
           <a:p>
-            <a:pPr algn="ctr"/>
+            <a:pPr algn="ctr">
+              <a:spcBef>
+                <a:spcPts val="0"/>
+              </a:spcBef>
+              <a:spcAft>
+                <a:spcPts val="0"/>
+              </a:spcAft>
+            </a:pPr>
           </a:p>
         </p:txBody>
       </p:sp>
@@ -6662,14 +7180,21 @@
               <a:lnSpc>
                 <a:spcPct val="112000"/>
               </a:lnSpc>
-            </a:pPr>
-            <a:r>
-              <a:rPr sz="1500" b="1" i="0">
+              <a:spcBef>
+                <a:spcPts val="0"/>
+              </a:spcBef>
+              <a:spcAft>
+                <a:spcPts val="0"/>
+              </a:spcAft>
+            </a:pPr>
+            <a:r>
+              <a:rPr sz="1500" b="1" i="0" lang="zh-CN" altLang="zh-CN">
                 <a:solidFill>
                   <a:srgbClr val="262626"/>
                 </a:solidFill>
                 <a:latin typeface="Microsoft YaHei"/>
                 <a:ea typeface="Microsoft YaHei"/>
+                <a:cs typeface="Microsoft YaHei"/>
               </a:rPr>
               <a:t>关键举措</a:t>
             </a:r>
@@ -6702,14 +7227,21 @@
               <a:lnSpc>
                 <a:spcPct val="125000"/>
               </a:lnSpc>
-            </a:pPr>
-            <a:r>
-              <a:rPr sz="1150" b="0" i="0">
+              <a:spcBef>
+                <a:spcPts val="0"/>
+              </a:spcBef>
+              <a:spcAft>
+                <a:spcPts val="0"/>
+              </a:spcAft>
+            </a:pPr>
+            <a:r>
+              <a:rPr sz="1150" b="0" i="0" lang="zh-CN" altLang="zh-CN">
                 <a:solidFill>
                   <a:srgbClr val="262626"/>
                 </a:solidFill>
                 <a:latin typeface="Microsoft YaHei"/>
                 <a:ea typeface="Microsoft YaHei"/>
+                <a:cs typeface="Microsoft YaHei"/>
               </a:rPr>
               <a:t>• 数字孪生底座: 全网资源与状态实时建模, 高危变更一律仿真先行验证</a:t>
             </a:r>
@@ -6719,14 +7251,21 @@
               <a:lnSpc>
                 <a:spcPct val="125000"/>
               </a:lnSpc>
-            </a:pPr>
-            <a:r>
-              <a:rPr sz="1150" b="0" i="0">
+              <a:spcBef>
+                <a:spcPts val="0"/>
+              </a:spcBef>
+              <a:spcAft>
+                <a:spcPts val="0"/>
+              </a:spcAft>
+            </a:pPr>
+            <a:r>
+              <a:rPr sz="1150" b="0" i="0" lang="zh-CN" altLang="zh-CN">
                 <a:solidFill>
                   <a:srgbClr val="262626"/>
                 </a:solidFill>
                 <a:latin typeface="Microsoft YaHei"/>
                 <a:ea typeface="Microsoft YaHei"/>
+                <a:cs typeface="Microsoft YaHei"/>
               </a:rPr>
               <a:t>• 意图引擎: 业务意图自动翻译为网络策略并闭环校验, 准确率达 92%</a:t>
             </a:r>
@@ -6736,14 +7275,21 @@
               <a:lnSpc>
                 <a:spcPct val="125000"/>
               </a:lnSpc>
-            </a:pPr>
-            <a:r>
-              <a:rPr sz="1150" b="0" i="0">
+              <a:spcBef>
+                <a:spcPts val="0"/>
+              </a:spcBef>
+              <a:spcAft>
+                <a:spcPts val="0"/>
+              </a:spcAft>
+            </a:pPr>
+            <a:r>
+              <a:rPr sz="1150" b="0" i="0" lang="zh-CN" altLang="zh-CN">
                 <a:solidFill>
                   <a:srgbClr val="262626"/>
                 </a:solidFill>
                 <a:latin typeface="Microsoft YaHei"/>
                 <a:ea typeface="Microsoft YaHei"/>
+                <a:cs typeface="Microsoft YaHei"/>
               </a:rPr>
               <a:t>• AI Agent 编排: 故障自愈覆盖 Top50 高频场景, MTTR 下降 68%</a:t>
             </a:r>
@@ -6753,14 +7299,21 @@
               <a:lnSpc>
                 <a:spcPct val="125000"/>
               </a:lnSpc>
-            </a:pPr>
-            <a:r>
-              <a:rPr sz="1150" b="0" i="0">
+              <a:spcBef>
+                <a:spcPts val="0"/>
+              </a:spcBef>
+              <a:spcAft>
+                <a:spcPts val="0"/>
+              </a:spcAft>
+            </a:pPr>
+            <a:r>
+              <a:rPr sz="1150" b="0" i="0" lang="zh-CN" altLang="zh-CN">
                 <a:solidFill>
                   <a:srgbClr val="262626"/>
                 </a:solidFill>
                 <a:latin typeface="Microsoft YaHei"/>
                 <a:ea typeface="Microsoft YaHei"/>
+                <a:cs typeface="Microsoft YaHei"/>
               </a:rPr>
               <a:t>• 故障预测: 基于时序特征提前 4 小时预警, 准确率 89%, 重大事故同比减半</a:t>
             </a:r>
@@ -6770,14 +7323,21 @@
               <a:lnSpc>
                 <a:spcPct val="125000"/>
               </a:lnSpc>
-            </a:pPr>
-            <a:r>
-              <a:rPr sz="1150" b="0" i="0">
+              <a:spcBef>
+                <a:spcPts val="0"/>
+              </a:spcBef>
+              <a:spcAft>
+                <a:spcPts val="0"/>
+              </a:spcAft>
+            </a:pPr>
+            <a:r>
+              <a:rPr sz="1150" b="0" i="0" lang="zh-CN" altLang="zh-CN">
                 <a:solidFill>
                   <a:srgbClr val="262626"/>
                 </a:solidFill>
                 <a:latin typeface="Microsoft YaHei"/>
                 <a:ea typeface="Microsoft YaHei"/>
+                <a:cs typeface="Microsoft YaHei"/>
               </a:rPr>
               <a:t>• 变更风控: 高危操作自动拦截+灰度放行, 事故率 -75%, 沉淀 12 万工单语料精调大模型</a:t>
             </a:r>
@@ -6824,7 +7384,14 @@
           <a:bodyPr rtlCol="0" anchor="ctr"/>
           <a:lstStyle/>
           <a:p>
-            <a:pPr algn="ctr"/>
+            <a:pPr algn="ctr">
+              <a:spcBef>
+                <a:spcPts val="0"/>
+              </a:spcBef>
+              <a:spcAft>
+                <a:spcPts val="0"/>
+              </a:spcAft>
+            </a:pPr>
           </a:p>
         </p:txBody>
       </p:sp>
@@ -6854,14 +7421,21 @@
               <a:lnSpc>
                 <a:spcPct val="112000"/>
               </a:lnSpc>
-            </a:pPr>
-            <a:r>
-              <a:rPr sz="1200" b="1" i="0">
+              <a:spcBef>
+                <a:spcPts val="0"/>
+              </a:spcBef>
+              <a:spcAft>
+                <a:spcPts val="0"/>
+              </a:spcAft>
+            </a:pPr>
+            <a:r>
+              <a:rPr sz="1200" b="1" i="0" lang="zh-CN" altLang="zh-CN">
                 <a:solidFill>
                   <a:srgbClr val="262626"/>
                 </a:solidFill>
                 <a:latin typeface="Microsoft YaHei"/>
                 <a:ea typeface="Microsoft YaHei"/>
+                <a:cs typeface="Microsoft YaHei"/>
               </a:rPr>
               <a:t>OPEX -35%</a:t>
             </a:r>
@@ -6908,7 +7482,14 @@
           <a:bodyPr rtlCol="0" anchor="ctr"/>
           <a:lstStyle/>
           <a:p>
-            <a:pPr algn="ctr"/>
+            <a:pPr algn="ctr">
+              <a:spcBef>
+                <a:spcPts val="0"/>
+              </a:spcBef>
+              <a:spcAft>
+                <a:spcPts val="0"/>
+              </a:spcAft>
+            </a:pPr>
           </a:p>
         </p:txBody>
       </p:sp>
@@ -6938,14 +7519,21 @@
               <a:lnSpc>
                 <a:spcPct val="112000"/>
               </a:lnSpc>
-            </a:pPr>
-            <a:r>
-              <a:rPr sz="1200" b="1" i="0">
+              <a:spcBef>
+                <a:spcPts val="0"/>
+              </a:spcBef>
+              <a:spcAft>
+                <a:spcPts val="0"/>
+              </a:spcAft>
+            </a:pPr>
+            <a:r>
+              <a:rPr sz="1200" b="1" i="0" lang="zh-CN" altLang="zh-CN">
                 <a:solidFill>
                   <a:srgbClr val="262626"/>
                 </a:solidFill>
                 <a:latin typeface="Microsoft YaHei"/>
                 <a:ea typeface="Microsoft YaHei"/>
+                <a:cs typeface="Microsoft YaHei"/>
               </a:rPr>
               <a:t>MTTR -68%</a:t>
             </a:r>
@@ -6992,7 +7580,14 @@
           <a:bodyPr rtlCol="0" anchor="ctr"/>
           <a:lstStyle/>
           <a:p>
-            <a:pPr algn="ctr"/>
+            <a:pPr algn="ctr">
+              <a:spcBef>
+                <a:spcPts val="0"/>
+              </a:spcBef>
+              <a:spcAft>
+                <a:spcPts val="0"/>
+              </a:spcAft>
+            </a:pPr>
           </a:p>
         </p:txBody>
       </p:sp>
@@ -7036,7 +7631,14 @@
           <a:bodyPr rtlCol="0" anchor="ctr"/>
           <a:lstStyle/>
           <a:p>
-            <a:pPr algn="ctr"/>
+            <a:pPr algn="ctr">
+              <a:spcBef>
+                <a:spcPts val="0"/>
+              </a:spcBef>
+              <a:spcAft>
+                <a:spcPts val="0"/>
+              </a:spcAft>
+            </a:pPr>
           </a:p>
         </p:txBody>
       </p:sp>
@@ -7066,14 +7668,21 @@
               <a:lnSpc>
                 <a:spcPct val="112000"/>
               </a:lnSpc>
-            </a:pPr>
-            <a:r>
-              <a:rPr sz="1400" b="1" i="0">
+              <a:spcBef>
+                <a:spcPts val="0"/>
+              </a:spcBef>
+              <a:spcAft>
+                <a:spcPts val="0"/>
+              </a:spcAft>
+            </a:pPr>
+            <a:r>
+              <a:rPr sz="1400" b="1" i="0" lang="zh-CN" altLang="zh-CN">
                 <a:solidFill>
                   <a:srgbClr val="262626"/>
                 </a:solidFill>
                 <a:latin typeface="Microsoft YaHei"/>
                 <a:ea typeface="Microsoft YaHei"/>
+                <a:cs typeface="Microsoft YaHei"/>
               </a:rPr>
               <a:t>各等级故障自愈率</a:t>
             </a:r>
@@ -7156,7 +7765,14 @@
           <a:bodyPr rtlCol="0" anchor="ctr"/>
           <a:lstStyle/>
           <a:p>
-            <a:pPr algn="ctr"/>
+            <a:pPr algn="ctr">
+              <a:spcBef>
+                <a:spcPts val="0"/>
+              </a:spcBef>
+              <a:spcAft>
+                <a:spcPts val="0"/>
+              </a:spcAft>
+            </a:pPr>
           </a:p>
         </p:txBody>
       </p:sp>
@@ -7168,8 +7784,8 @@
         </p:nvSpPr>
         <p:spPr>
           <a:xfrm>
-            <a:off x="9269095" y="5500570"/>
-            <a:ext cx="469899" cy="139700"/>
+            <a:off x="9269095" y="5480186"/>
+            <a:ext cx="469899" cy="180467"/>
           </a:xfrm>
           <a:prstGeom prst="rect">
             <a:avLst/>
@@ -7186,14 +7802,21 @@
               <a:lnSpc>
                 <a:spcPct val="112000"/>
               </a:lnSpc>
-            </a:pPr>
-            <a:r>
-              <a:rPr sz="1000" b="1" i="0">
+              <a:spcBef>
+                <a:spcPts val="0"/>
+              </a:spcBef>
+              <a:spcAft>
+                <a:spcPts val="0"/>
+              </a:spcAft>
+            </a:pPr>
+            <a:r>
+              <a:rPr sz="1000" b="1" i="0" lang="zh-CN" altLang="zh-CN">
                 <a:solidFill>
                   <a:srgbClr val="262626"/>
                 </a:solidFill>
                 <a:latin typeface="Microsoft YaHei"/>
                 <a:ea typeface="Microsoft YaHei"/>
+                <a:cs typeface="Microsoft YaHei"/>
               </a:rPr>
               <a:t>15%</a:t>
             </a:r>
@@ -7226,14 +7849,21 @@
               <a:lnSpc>
                 <a:spcPct val="112000"/>
               </a:lnSpc>
-            </a:pPr>
-            <a:r>
-              <a:rPr sz="950" b="0" i="0">
+              <a:spcBef>
+                <a:spcPts val="0"/>
+              </a:spcBef>
+              <a:spcAft>
+                <a:spcPts val="0"/>
+              </a:spcAft>
+            </a:pPr>
+            <a:r>
+              <a:rPr sz="950" b="0" i="0" lang="zh-CN" altLang="zh-CN">
                 <a:solidFill>
                   <a:srgbClr val="595959"/>
                 </a:solidFill>
                 <a:latin typeface="Microsoft YaHei"/>
                 <a:ea typeface="Microsoft YaHei"/>
+                <a:cs typeface="Microsoft YaHei"/>
               </a:rPr>
               <a:t>L1</a:t>
             </a:r>
@@ -7280,7 +7910,14 @@
           <a:bodyPr rtlCol="0" anchor="ctr"/>
           <a:lstStyle/>
           <a:p>
-            <a:pPr algn="ctr"/>
+            <a:pPr algn="ctr">
+              <a:spcBef>
+                <a:spcPts val="0"/>
+              </a:spcBef>
+              <a:spcAft>
+                <a:spcPts val="0"/>
+              </a:spcAft>
+            </a:pPr>
           </a:p>
         </p:txBody>
       </p:sp>
@@ -7292,8 +7929,8 @@
         </p:nvSpPr>
         <p:spPr>
           <a:xfrm>
-            <a:off x="9738995" y="5282397"/>
-            <a:ext cx="469899" cy="139700"/>
+            <a:off x="9738995" y="5262013"/>
+            <a:ext cx="469899" cy="180467"/>
           </a:xfrm>
           <a:prstGeom prst="rect">
             <a:avLst/>
@@ -7310,14 +7947,21 @@
               <a:lnSpc>
                 <a:spcPct val="112000"/>
               </a:lnSpc>
-            </a:pPr>
-            <a:r>
-              <a:rPr sz="1000" b="1" i="0">
+              <a:spcBef>
+                <a:spcPts val="0"/>
+              </a:spcBef>
+              <a:spcAft>
+                <a:spcPts val="0"/>
+              </a:spcAft>
+            </a:pPr>
+            <a:r>
+              <a:rPr sz="1000" b="1" i="0" lang="zh-CN" altLang="zh-CN">
                 <a:solidFill>
                   <a:srgbClr val="262626"/>
                 </a:solidFill>
                 <a:latin typeface="Microsoft YaHei"/>
                 <a:ea typeface="Microsoft YaHei"/>
+                <a:cs typeface="Microsoft YaHei"/>
               </a:rPr>
               <a:t>35%</a:t>
             </a:r>
@@ -7350,14 +7994,21 @@
               <a:lnSpc>
                 <a:spcPct val="112000"/>
               </a:lnSpc>
-            </a:pPr>
-            <a:r>
-              <a:rPr sz="950" b="0" i="0">
+              <a:spcBef>
+                <a:spcPts val="0"/>
+              </a:spcBef>
+              <a:spcAft>
+                <a:spcPts val="0"/>
+              </a:spcAft>
+            </a:pPr>
+            <a:r>
+              <a:rPr sz="950" b="0" i="0" lang="zh-CN" altLang="zh-CN">
                 <a:solidFill>
                   <a:srgbClr val="595959"/>
                 </a:solidFill>
                 <a:latin typeface="Microsoft YaHei"/>
                 <a:ea typeface="Microsoft YaHei"/>
+                <a:cs typeface="Microsoft YaHei"/>
               </a:rPr>
               <a:t>L2</a:t>
             </a:r>
@@ -7404,7 +8055,14 @@
           <a:bodyPr rtlCol="0" anchor="ctr"/>
           <a:lstStyle/>
           <a:p>
-            <a:pPr algn="ctr"/>
+            <a:pPr algn="ctr">
+              <a:spcBef>
+                <a:spcPts val="0"/>
+              </a:spcBef>
+              <a:spcAft>
+                <a:spcPts val="0"/>
+              </a:spcAft>
+            </a:pPr>
           </a:p>
         </p:txBody>
       </p:sp>
@@ -7416,8 +8074,8 @@
         </p:nvSpPr>
         <p:spPr>
           <a:xfrm>
-            <a:off x="10208895" y="5009682"/>
-            <a:ext cx="469899" cy="139700"/>
+            <a:off x="10208895" y="4989298"/>
+            <a:ext cx="469899" cy="180467"/>
           </a:xfrm>
           <a:prstGeom prst="rect">
             <a:avLst/>
@@ -7434,14 +8092,21 @@
               <a:lnSpc>
                 <a:spcPct val="112000"/>
               </a:lnSpc>
-            </a:pPr>
-            <a:r>
-              <a:rPr sz="1000" b="1" i="0">
+              <a:spcBef>
+                <a:spcPts val="0"/>
+              </a:spcBef>
+              <a:spcAft>
+                <a:spcPts val="0"/>
+              </a:spcAft>
+            </a:pPr>
+            <a:r>
+              <a:rPr sz="1000" b="1" i="0" lang="zh-CN" altLang="zh-CN">
                 <a:solidFill>
                   <a:srgbClr val="262626"/>
                 </a:solidFill>
                 <a:latin typeface="Microsoft YaHei"/>
                 <a:ea typeface="Microsoft YaHei"/>
+                <a:cs typeface="Microsoft YaHei"/>
               </a:rPr>
               <a:t>60%</a:t>
             </a:r>
@@ -7474,14 +8139,21 @@
               <a:lnSpc>
                 <a:spcPct val="112000"/>
               </a:lnSpc>
-            </a:pPr>
-            <a:r>
-              <a:rPr sz="950" b="0" i="0">
+              <a:spcBef>
+                <a:spcPts val="0"/>
+              </a:spcBef>
+              <a:spcAft>
+                <a:spcPts val="0"/>
+              </a:spcAft>
+            </a:pPr>
+            <a:r>
+              <a:rPr sz="950" b="0" i="0" lang="zh-CN" altLang="zh-CN">
                 <a:solidFill>
                   <a:srgbClr val="595959"/>
                 </a:solidFill>
                 <a:latin typeface="Microsoft YaHei"/>
                 <a:ea typeface="Microsoft YaHei"/>
+                <a:cs typeface="Microsoft YaHei"/>
               </a:rPr>
               <a:t>L3</a:t>
             </a:r>
@@ -7528,7 +8200,14 @@
           <a:bodyPr rtlCol="0" anchor="ctr"/>
           <a:lstStyle/>
           <a:p>
-            <a:pPr algn="ctr"/>
+            <a:pPr algn="ctr">
+              <a:spcBef>
+                <a:spcPts val="0"/>
+              </a:spcBef>
+              <a:spcAft>
+                <a:spcPts val="0"/>
+              </a:spcAft>
+            </a:pPr>
           </a:p>
         </p:txBody>
       </p:sp>
@@ -7540,8 +8219,8 @@
         </p:nvSpPr>
         <p:spPr>
           <a:xfrm>
-            <a:off x="10678795" y="4769692"/>
-            <a:ext cx="469899" cy="139700"/>
+            <a:off x="10678795" y="4749308"/>
+            <a:ext cx="469899" cy="180467"/>
           </a:xfrm>
           <a:prstGeom prst="rect">
             <a:avLst/>
@@ -7558,14 +8237,21 @@
               <a:lnSpc>
                 <a:spcPct val="112000"/>
               </a:lnSpc>
-            </a:pPr>
-            <a:r>
-              <a:rPr sz="1000" b="1" i="0">
+              <a:spcBef>
+                <a:spcPts val="0"/>
+              </a:spcBef>
+              <a:spcAft>
+                <a:spcPts val="0"/>
+              </a:spcAft>
+            </a:pPr>
+            <a:r>
+              <a:rPr sz="1000" b="1" i="0" lang="zh-CN" altLang="zh-CN">
                 <a:solidFill>
                   <a:srgbClr val="262626"/>
                 </a:solidFill>
                 <a:latin typeface="Microsoft YaHei"/>
                 <a:ea typeface="Microsoft YaHei"/>
+                <a:cs typeface="Microsoft YaHei"/>
               </a:rPr>
               <a:t>82%</a:t>
             </a:r>
@@ -7598,14 +8284,21 @@
               <a:lnSpc>
                 <a:spcPct val="112000"/>
               </a:lnSpc>
-            </a:pPr>
-            <a:r>
-              <a:rPr sz="950" b="0" i="0">
+              <a:spcBef>
+                <a:spcPts val="0"/>
+              </a:spcBef>
+              <a:spcAft>
+                <a:spcPts val="0"/>
+              </a:spcAft>
+            </a:pPr>
+            <a:r>
+              <a:rPr sz="950" b="0" i="0" lang="zh-CN" altLang="zh-CN">
                 <a:solidFill>
                   <a:srgbClr val="595959"/>
                 </a:solidFill>
                 <a:latin typeface="Microsoft YaHei"/>
                 <a:ea typeface="Microsoft YaHei"/>
+                <a:cs typeface="Microsoft YaHei"/>
               </a:rPr>
               <a:t>L4</a:t>
             </a:r>
@@ -7652,7 +8345,14 @@
           <a:bodyPr rtlCol="0" anchor="ctr"/>
           <a:lstStyle/>
           <a:p>
-            <a:pPr algn="ctr"/>
+            <a:pPr algn="ctr">
+              <a:spcBef>
+                <a:spcPts val="0"/>
+              </a:spcBef>
+              <a:spcAft>
+                <a:spcPts val="0"/>
+              </a:spcAft>
+            </a:pPr>
           </a:p>
         </p:txBody>
       </p:sp>
@@ -7664,8 +8364,8 @@
         </p:nvSpPr>
         <p:spPr>
           <a:xfrm>
-            <a:off x="11148695" y="4627880"/>
-            <a:ext cx="469899" cy="139700"/>
+            <a:off x="11148695" y="4607496"/>
+            <a:ext cx="469899" cy="180467"/>
           </a:xfrm>
           <a:prstGeom prst="rect">
             <a:avLst/>
@@ -7682,14 +8382,21 @@
               <a:lnSpc>
                 <a:spcPct val="112000"/>
               </a:lnSpc>
-            </a:pPr>
-            <a:r>
-              <a:rPr sz="1000" b="1" i="0">
+              <a:spcBef>
+                <a:spcPts val="0"/>
+              </a:spcBef>
+              <a:spcAft>
+                <a:spcPts val="0"/>
+              </a:spcAft>
+            </a:pPr>
+            <a:r>
+              <a:rPr sz="1000" b="1" i="0" lang="zh-CN" altLang="zh-CN">
                 <a:solidFill>
                   <a:srgbClr val="262626"/>
                 </a:solidFill>
                 <a:latin typeface="Microsoft YaHei"/>
                 <a:ea typeface="Microsoft YaHei"/>
+                <a:cs typeface="Microsoft YaHei"/>
               </a:rPr>
               <a:t>95%</a:t>
             </a:r>
@@ -7722,14 +8429,21 @@
               <a:lnSpc>
                 <a:spcPct val="112000"/>
               </a:lnSpc>
-            </a:pPr>
-            <a:r>
-              <a:rPr sz="950" b="0" i="0">
+              <a:spcBef>
+                <a:spcPts val="0"/>
+              </a:spcBef>
+              <a:spcAft>
+                <a:spcPts val="0"/>
+              </a:spcAft>
+            </a:pPr>
+            <a:r>
+              <a:rPr sz="950" b="0" i="0" lang="zh-CN" altLang="zh-CN">
                 <a:solidFill>
                   <a:srgbClr val="595959"/>
                 </a:solidFill>
                 <a:latin typeface="Microsoft YaHei"/>
                 <a:ea typeface="Microsoft YaHei"/>
+                <a:cs typeface="Microsoft YaHei"/>
               </a:rPr>
               <a:t>L5</a:t>
             </a:r>
